--- a/howtowork/fig/slide.pptx
+++ b/howtowork/fig/slide.pptx
@@ -5,7 +5,7 @@
     <p:sldMasterId id="2147483663" r:id="rId1"/>
   </p:sldMasterIdLst>
   <p:notesMasterIdLst>
-    <p:notesMasterId r:id="rId26"/>
+    <p:notesMasterId r:id="rId27"/>
   </p:notesMasterIdLst>
   <p:sldIdLst>
     <p:sldId id="256" r:id="rId2"/>
@@ -32,6 +32,7 @@
     <p:sldId id="328" r:id="rId23"/>
     <p:sldId id="329" r:id="rId24"/>
     <p:sldId id="330" r:id="rId25"/>
+    <p:sldId id="334" r:id="rId26"/>
   </p:sldIdLst>
   <p:sldSz cx="9144000" cy="6858000" type="screen4x3"/>
   <p:notesSz cx="6858000" cy="9144000"/>
@@ -230,7 +231,7 @@
           </a:lstStyle>
           <a:p>
             <a:fld id="{6B8D1B20-A248-FB47-8240-73C0C5F47C9D}" type="datetimeFigureOut">
-              <a:t>2022/12/16</a:t>
+              <a:t>2025/12/16</a:t>
             </a:fld>
             <a:endParaRPr kumimoji="1" lang="ja-JP" altLang="en-US" dirty="0"/>
           </a:p>
@@ -754,7 +755,7 @@
             <a:pPr algn="ctr"/>
             <a:r>
               <a:rPr kumimoji="1" lang="en-US" altLang="ja-JP" sz="1400" dirty="0"/>
-              <a:t>24</a:t>
+              <a:t>25</a:t>
             </a:r>
             <a:endParaRPr kumimoji="1" lang="ja-JP" altLang="en-US" sz="1400" dirty="0"/>
           </a:p>
@@ -3199,7 +3200,7 @@
           <a:p>
             <a:r>
               <a:rPr lang="en-US" altLang="ja-JP" sz="1400" dirty="0"/>
-              <a:t>BINARY_ADD</a:t>
+              <a:t>BINARY_OP (+)</a:t>
             </a:r>
             <a:endParaRPr kumimoji="1" lang="ja-JP" altLang="en-US" sz="1400" dirty="0"/>
           </a:p>
@@ -4570,7 +4571,7 @@
           <a:p>
             <a:r>
               <a:rPr lang="en-US" altLang="ja-JP" sz="1600" dirty="0"/>
-              <a:t>BINARY_ADD</a:t>
+              <a:t>BINARY_OP (+)</a:t>
             </a:r>
             <a:endParaRPr kumimoji="1" lang="ja-JP" altLang="en-US" sz="1600" dirty="0"/>
           </a:p>
@@ -7908,7 +7909,7 @@
         <p:spPr>
           <a:xfrm>
             <a:off x="3563888" y="3068960"/>
-            <a:ext cx="1417183" cy="369332"/>
+            <a:ext cx="1849865" cy="369332"/>
           </a:xfrm>
           <a:prstGeom prst="rect">
             <a:avLst/>
@@ -7922,7 +7923,7 @@
           <a:p>
             <a:r>
               <a:rPr lang="en-US" altLang="ja-JP" dirty="0"/>
-              <a:t>BINARY_ADD</a:t>
+              <a:t>BINARY_OP (+)</a:t>
             </a:r>
           </a:p>
         </p:txBody>
@@ -9912,7 +9913,7 @@
           <a:p>
             <a:r>
               <a:rPr lang="en-US" altLang="ja-JP" sz="2400" dirty="0"/>
-              <a:t>BINARY_ADD</a:t>
+              <a:t>BINARY_OP (+)</a:t>
             </a:r>
             <a:endParaRPr kumimoji="1" lang="ja-JP" altLang="en-US" sz="2400" dirty="0"/>
           </a:p>
@@ -10421,7 +10422,7 @@
           <a:p>
             <a:r>
               <a:rPr lang="en-US" altLang="ja-JP" sz="2400" dirty="0"/>
-              <a:t>BINARY_ADD</a:t>
+              <a:t>BINARY_OP (+)</a:t>
             </a:r>
             <a:endParaRPr kumimoji="1" lang="ja-JP" altLang="en-US" sz="2400" dirty="0"/>
           </a:p>
@@ -13813,7 +13814,7 @@
         <p:spPr>
           <a:xfrm>
             <a:off x="5796136" y="2420888"/>
-            <a:ext cx="1903983" cy="369332"/>
+            <a:ext cx="1804981" cy="369332"/>
           </a:xfrm>
           <a:prstGeom prst="rect">
             <a:avLst/>
@@ -13827,7 +13828,7 @@
           <a:p>
             <a:r>
               <a:rPr lang="en-US" altLang="ja-JP" dirty="0"/>
-              <a:t>BINARY_MULTIPLY</a:t>
+              <a:t>BINARY_OP (*)</a:t>
             </a:r>
           </a:p>
         </p:txBody>
@@ -13847,7 +13848,7 @@
         <p:spPr>
           <a:xfrm>
             <a:off x="5220072" y="4725144"/>
-            <a:ext cx="1417183" cy="369332"/>
+            <a:ext cx="1849865" cy="369332"/>
           </a:xfrm>
           <a:prstGeom prst="rect">
             <a:avLst/>
@@ -13861,7 +13862,7 @@
           <a:p>
             <a:r>
               <a:rPr lang="en-US" altLang="ja-JP" dirty="0"/>
-              <a:t>BINARY_ADD</a:t>
+              <a:t>BINARY_OP (+)</a:t>
             </a:r>
           </a:p>
         </p:txBody>
@@ -14013,7 +14014,7 @@
           <a:p>
             <a:pPr algn="ctr"/>
             <a:r>
-              <a:rPr lang="en" altLang="ja-JP" sz="2400" b="0">
+              <a:rPr lang="en" altLang="ja-JP" sz="2400" b="0" dirty="0">
                 <a:solidFill>
                   <a:srgbClr val="CE9178"/>
                 </a:solidFill>
@@ -14022,7 +14023,7 @@
               </a:rPr>
               <a:t>a + b * c</a:t>
             </a:r>
-            <a:endParaRPr lang="en" altLang="ja-JP" sz="2400" b="0">
+            <a:endParaRPr lang="en" altLang="ja-JP" sz="2400" b="0" dirty="0">
               <a:solidFill>
                 <a:srgbClr val="D4D4D4"/>
               </a:solidFill>
@@ -17623,7 +17624,7 @@
           <a:p>
             <a:r>
               <a:rPr lang="en-US" altLang="ja-JP" dirty="0"/>
-              <a:t>BINARY_MULTIPLY</a:t>
+              <a:t>BINARY_OP (*)</a:t>
             </a:r>
           </a:p>
         </p:txBody>
@@ -17642,8 +17643,8 @@
         </p:nvSpPr>
         <p:spPr>
           <a:xfrm>
-            <a:off x="3635896" y="5085184"/>
-            <a:ext cx="1584176" cy="369332"/>
+            <a:off x="3635895" y="5085184"/>
+            <a:ext cx="2035384" cy="369332"/>
           </a:xfrm>
           <a:prstGeom prst="rect">
             <a:avLst/>
@@ -17657,7 +17658,7 @@
           <a:p>
             <a:r>
               <a:rPr lang="en-US" altLang="ja-JP" dirty="0"/>
-              <a:t>BINARY_ADD</a:t>
+              <a:t>BINARY_OP (+)</a:t>
             </a:r>
           </a:p>
         </p:txBody>
@@ -18910,7 +18911,7 @@
           <a:p>
             <a:r>
               <a:rPr lang="en-US" altLang="ja-JP" dirty="0"/>
-              <a:t>BINARY_ADD</a:t>
+              <a:t>BINARY_OP (+)</a:t>
             </a:r>
             <a:endParaRPr kumimoji="1" lang="ja-JP" altLang="en-US" dirty="0"/>
           </a:p>
@@ -19820,7 +19821,7 @@
           <a:p>
             <a:r>
               <a:rPr lang="en-US" altLang="ja-JP" dirty="0"/>
-              <a:t>BINARY_ADD</a:t>
+              <a:t>BINARY_OP (+)</a:t>
             </a:r>
             <a:endParaRPr kumimoji="1" lang="ja-JP" altLang="en-US" dirty="0"/>
           </a:p>
@@ -20761,7 +20762,7 @@
           <a:p>
             <a:r>
               <a:rPr lang="en-US" altLang="ja-JP" sz="1400" dirty="0"/>
-              <a:t>BINARY_ADD</a:t>
+              <a:t>BINARY_OP (+)</a:t>
             </a:r>
             <a:endParaRPr kumimoji="1" lang="ja-JP" altLang="en-US" sz="1400" dirty="0"/>
           </a:p>
@@ -21876,7 +21877,7 @@
           <a:p>
             <a:r>
               <a:rPr lang="en-US" altLang="ja-JP" sz="1400" dirty="0"/>
-              <a:t>BINARY_ADD</a:t>
+              <a:t>BINARY_OP (+)</a:t>
             </a:r>
             <a:endParaRPr kumimoji="1" lang="ja-JP" altLang="en-US" sz="1400" dirty="0"/>
           </a:p>
@@ -22903,7 +22904,7 @@
         <p:spPr>
           <a:xfrm>
             <a:off x="1187624" y="5805264"/>
-            <a:ext cx="1941557" cy="646331"/>
+            <a:ext cx="1890261" cy="646331"/>
           </a:xfrm>
           <a:prstGeom prst="rect">
             <a:avLst/>
@@ -22921,7 +22922,7 @@
                 <a:latin typeface="Arial" panose="020B0604020202020204" pitchFamily="34" charset="0"/>
                 <a:cs typeface="Arial" panose="020B0604020202020204" pitchFamily="34" charset="0"/>
               </a:rPr>
-              <a:t>a + b x c</a:t>
+              <a:t>a + b * c</a:t>
             </a:r>
             <a:endParaRPr kumimoji="1" lang="ja-JP" altLang="en-US" sz="3600" dirty="0">
               <a:latin typeface="Arial" panose="020B0604020202020204" pitchFamily="34" charset="0"/>
@@ -23035,6 +23036,479 @@
     <p:extLst>
       <p:ext uri="{BB962C8B-B14F-4D97-AF65-F5344CB8AC3E}">
         <p14:creationId xmlns:p14="http://schemas.microsoft.com/office/powerpoint/2010/main" val="4190764109"/>
+      </p:ext>
+    </p:extLst>
+  </p:cSld>
+  <p:clrMapOvr>
+    <a:masterClrMapping/>
+  </p:clrMapOvr>
+</p:sld>
+</file>
+
+<file path=ppt/slides/slide25.xml><?xml version="1.0" encoding="utf-8"?>
+<p:sld xmlns:a="http://schemas.openxmlformats.org/drawingml/2006/main" xmlns:r="http://schemas.openxmlformats.org/officeDocument/2006/relationships" xmlns:p="http://schemas.openxmlformats.org/presentationml/2006/main">
+  <p:cSld>
+    <p:spTree>
+      <p:nvGrpSpPr>
+        <p:cNvPr id="1" name=""/>
+        <p:cNvGrpSpPr/>
+        <p:nvPr/>
+      </p:nvGrpSpPr>
+      <p:grpSpPr>
+        <a:xfrm>
+          <a:off x="0" y="0"/>
+          <a:ext cx="0" cy="0"/>
+          <a:chOff x="0" y="0"/>
+          <a:chExt cx="0" cy="0"/>
+        </a:xfrm>
+      </p:grpSpPr>
+      <p:sp>
+        <p:nvSpPr>
+          <p:cNvPr id="2" name="テキスト プレースホルダー 1">
+            <a:extLst>
+              <a:ext uri="{FF2B5EF4-FFF2-40B4-BE49-F238E27FC236}">
+                <a16:creationId xmlns:a16="http://schemas.microsoft.com/office/drawing/2014/main" id="{4B28D302-CADB-BA89-D3D2-422687F9CAA7}"/>
+              </a:ext>
+            </a:extLst>
+          </p:cNvPr>
+          <p:cNvSpPr>
+            <a:spLocks noGrp="1"/>
+          </p:cNvSpPr>
+          <p:nvPr>
+            <p:ph type="body" sz="quarter" idx="10"/>
+          </p:nvPr>
+        </p:nvSpPr>
+        <p:spPr/>
+        <p:txBody>
+          <a:bodyPr/>
+          <a:lstStyle/>
+          <a:p>
+            <a:r>
+              <a:rPr kumimoji="1" lang="ja-JP" altLang="en-US"/>
+              <a:t>暇で仕方ない人向け</a:t>
+            </a:r>
+          </a:p>
+        </p:txBody>
+      </p:sp>
+      <p:sp>
+        <p:nvSpPr>
+          <p:cNvPr id="3" name="テキスト ボックス 2">
+            <a:extLst>
+              <a:ext uri="{FF2B5EF4-FFF2-40B4-BE49-F238E27FC236}">
+                <a16:creationId xmlns:a16="http://schemas.microsoft.com/office/drawing/2014/main" id="{8D3C0E7C-F8F8-8188-0FA8-CD03E85CF172}"/>
+              </a:ext>
+            </a:extLst>
+          </p:cNvPr>
+          <p:cNvSpPr txBox="1"/>
+          <p:nvPr/>
+        </p:nvSpPr>
+        <p:spPr>
+          <a:xfrm>
+            <a:off x="341590" y="1135464"/>
+            <a:ext cx="8802410" cy="523220"/>
+          </a:xfrm>
+          <a:prstGeom prst="rect">
+            <a:avLst/>
+          </a:prstGeom>
+          <a:noFill/>
+        </p:spPr>
+        <p:txBody>
+          <a:bodyPr wrap="none" rtlCol="0">
+            <a:spAutoFit/>
+          </a:bodyPr>
+          <a:lstStyle/>
+          <a:p>
+            <a:r>
+              <a:rPr kumimoji="1" lang="ja-JP" altLang="en-US" sz="2800"/>
+              <a:t>中置記法から逆ポーランド記法への変換コードを書く</a:t>
+            </a:r>
+          </a:p>
+        </p:txBody>
+      </p:sp>
+      <p:sp>
+        <p:nvSpPr>
+          <p:cNvPr id="5" name="正方形/長方形 4">
+            <a:extLst>
+              <a:ext uri="{FF2B5EF4-FFF2-40B4-BE49-F238E27FC236}">
+                <a16:creationId xmlns:a16="http://schemas.microsoft.com/office/drawing/2014/main" id="{C5DE0DC7-3829-9A01-99C1-D1D2BC211AF0}"/>
+              </a:ext>
+            </a:extLst>
+          </p:cNvPr>
+          <p:cNvSpPr/>
+          <p:nvPr/>
+        </p:nvSpPr>
+        <p:spPr>
+          <a:xfrm>
+            <a:off x="3688509" y="1849953"/>
+            <a:ext cx="5113900" cy="523220"/>
+          </a:xfrm>
+          <a:prstGeom prst="rect">
+            <a:avLst/>
+          </a:prstGeom>
+          <a:solidFill>
+            <a:schemeClr val="tx1"/>
+          </a:solidFill>
+        </p:spPr>
+        <p:txBody>
+          <a:bodyPr wrap="none">
+            <a:spAutoFit/>
+          </a:bodyPr>
+          <a:lstStyle/>
+          <a:p>
+            <a:r>
+              <a:rPr lang="en-US" altLang="ja-JP" sz="2800" dirty="0">
+                <a:solidFill>
+                  <a:schemeClr val="accent1"/>
+                </a:solidFill>
+                <a:latin typeface="Consolas" panose="020B0609020204030204" pitchFamily="49" charset="0"/>
+                <a:cs typeface="Consolas" panose="020B0609020204030204" pitchFamily="49" charset="0"/>
+              </a:rPr>
+              <a:t>['a', '+', 'b', '*', 'c']</a:t>
+            </a:r>
+          </a:p>
+        </p:txBody>
+      </p:sp>
+      <p:sp>
+        <p:nvSpPr>
+          <p:cNvPr id="6" name="正方形/長方形 5">
+            <a:extLst>
+              <a:ext uri="{FF2B5EF4-FFF2-40B4-BE49-F238E27FC236}">
+                <a16:creationId xmlns:a16="http://schemas.microsoft.com/office/drawing/2014/main" id="{68EC4D85-F42E-DF27-14BB-1EC39E8C8629}"/>
+              </a:ext>
+            </a:extLst>
+          </p:cNvPr>
+          <p:cNvSpPr/>
+          <p:nvPr/>
+        </p:nvSpPr>
+        <p:spPr>
+          <a:xfrm>
+            <a:off x="3688510" y="3233099"/>
+            <a:ext cx="5113900" cy="523220"/>
+          </a:xfrm>
+          <a:prstGeom prst="rect">
+            <a:avLst/>
+          </a:prstGeom>
+          <a:solidFill>
+            <a:schemeClr val="tx1"/>
+          </a:solidFill>
+        </p:spPr>
+        <p:txBody>
+          <a:bodyPr wrap="square">
+            <a:spAutoFit/>
+          </a:bodyPr>
+          <a:lstStyle/>
+          <a:p>
+            <a:r>
+              <a:rPr lang="en-US" altLang="ja-JP" sz="2800" dirty="0">
+                <a:solidFill>
+                  <a:schemeClr val="accent1"/>
+                </a:solidFill>
+                <a:latin typeface="Consolas" panose="020B0609020204030204" pitchFamily="49" charset="0"/>
+                <a:cs typeface="Consolas" panose="020B0609020204030204" pitchFamily="49" charset="0"/>
+              </a:rPr>
+              <a:t>['a', 'b', 'c', '*', '+']</a:t>
+            </a:r>
+          </a:p>
+        </p:txBody>
+      </p:sp>
+      <p:sp>
+        <p:nvSpPr>
+          <p:cNvPr id="7" name="下矢印 6">
+            <a:extLst>
+              <a:ext uri="{FF2B5EF4-FFF2-40B4-BE49-F238E27FC236}">
+                <a16:creationId xmlns:a16="http://schemas.microsoft.com/office/drawing/2014/main" id="{54DCB8D6-7555-A8B5-1B25-D70CC80748DC}"/>
+              </a:ext>
+            </a:extLst>
+          </p:cNvPr>
+          <p:cNvSpPr/>
+          <p:nvPr/>
+        </p:nvSpPr>
+        <p:spPr>
+          <a:xfrm>
+            <a:off x="5793284" y="2582071"/>
+            <a:ext cx="452175" cy="462225"/>
+          </a:xfrm>
+          <a:prstGeom prst="downArrow">
+            <a:avLst/>
+          </a:prstGeom>
+          <a:solidFill>
+            <a:srgbClr val="FF0000"/>
+          </a:solidFill>
+          <a:ln>
+            <a:solidFill>
+              <a:schemeClr val="tx1"/>
+            </a:solidFill>
+          </a:ln>
+        </p:spPr>
+        <p:style>
+          <a:lnRef idx="2">
+            <a:schemeClr val="accent1">
+              <a:shade val="50000"/>
+            </a:schemeClr>
+          </a:lnRef>
+          <a:fillRef idx="1">
+            <a:schemeClr val="accent1"/>
+          </a:fillRef>
+          <a:effectRef idx="0">
+            <a:schemeClr val="accent1"/>
+          </a:effectRef>
+          <a:fontRef idx="minor">
+            <a:schemeClr val="lt1"/>
+          </a:fontRef>
+        </p:style>
+        <p:txBody>
+          <a:bodyPr rtlCol="0" anchor="ctr"/>
+          <a:lstStyle/>
+          <a:p>
+            <a:pPr algn="ctr"/>
+            <a:endParaRPr kumimoji="1" lang="ja-JP" altLang="en-US"/>
+          </a:p>
+        </p:txBody>
+      </p:sp>
+      <p:sp>
+        <p:nvSpPr>
+          <p:cNvPr id="20" name="テキスト ボックス 19">
+            <a:extLst>
+              <a:ext uri="{FF2B5EF4-FFF2-40B4-BE49-F238E27FC236}">
+                <a16:creationId xmlns:a16="http://schemas.microsoft.com/office/drawing/2014/main" id="{C169FC02-0509-A539-D571-10342616CD99}"/>
+              </a:ext>
+            </a:extLst>
+          </p:cNvPr>
+          <p:cNvSpPr txBox="1"/>
+          <p:nvPr/>
+        </p:nvSpPr>
+        <p:spPr>
+          <a:xfrm>
+            <a:off x="341590" y="4223218"/>
+            <a:ext cx="3775393" cy="523220"/>
+          </a:xfrm>
+          <a:prstGeom prst="rect">
+            <a:avLst/>
+          </a:prstGeom>
+          <a:noFill/>
+        </p:spPr>
+        <p:txBody>
+          <a:bodyPr wrap="none" rtlCol="0">
+            <a:spAutoFit/>
+          </a:bodyPr>
+          <a:lstStyle/>
+          <a:p>
+            <a:r>
+              <a:rPr kumimoji="1" lang="ja-JP" altLang="en-US" sz="2800"/>
+              <a:t>カッコがある場合は？</a:t>
+            </a:r>
+          </a:p>
+        </p:txBody>
+      </p:sp>
+      <p:sp>
+        <p:nvSpPr>
+          <p:cNvPr id="21" name="正方形/長方形 20">
+            <a:extLst>
+              <a:ext uri="{FF2B5EF4-FFF2-40B4-BE49-F238E27FC236}">
+                <a16:creationId xmlns:a16="http://schemas.microsoft.com/office/drawing/2014/main" id="{06614A8E-1D8F-D3F2-70FD-C28035D1CC1E}"/>
+              </a:ext>
+            </a:extLst>
+          </p:cNvPr>
+          <p:cNvSpPr/>
+          <p:nvPr/>
+        </p:nvSpPr>
+        <p:spPr>
+          <a:xfrm>
+            <a:off x="1605894" y="5460926"/>
+            <a:ext cx="7398580" cy="523220"/>
+          </a:xfrm>
+          <a:prstGeom prst="rect">
+            <a:avLst/>
+          </a:prstGeom>
+          <a:solidFill>
+            <a:schemeClr val="tx1"/>
+          </a:solidFill>
+        </p:spPr>
+        <p:txBody>
+          <a:bodyPr wrap="square">
+            <a:spAutoFit/>
+          </a:bodyPr>
+          <a:lstStyle/>
+          <a:p>
+            <a:r>
+              <a:rPr lang="en-US" altLang="ja-JP" sz="2800" dirty="0">
+                <a:solidFill>
+                  <a:schemeClr val="accent1"/>
+                </a:solidFill>
+                <a:latin typeface="Consolas" panose="020B0609020204030204" pitchFamily="49" charset="0"/>
+                <a:cs typeface="Consolas" panose="020B0609020204030204" pitchFamily="49" charset="0"/>
+              </a:rPr>
+              <a:t>['(', 'a', '+', 'b', ')', '*', 'c']</a:t>
+            </a:r>
+          </a:p>
+        </p:txBody>
+      </p:sp>
+      <p:sp>
+        <p:nvSpPr>
+          <p:cNvPr id="22" name="正方形/長方形 21">
+            <a:extLst>
+              <a:ext uri="{FF2B5EF4-FFF2-40B4-BE49-F238E27FC236}">
+                <a16:creationId xmlns:a16="http://schemas.microsoft.com/office/drawing/2014/main" id="{1A3A7E1A-4119-6607-78F0-4D444BC3A3C2}"/>
+              </a:ext>
+            </a:extLst>
+          </p:cNvPr>
+          <p:cNvSpPr/>
+          <p:nvPr/>
+        </p:nvSpPr>
+        <p:spPr>
+          <a:xfrm>
+            <a:off x="1350429" y="3277896"/>
+            <a:ext cx="1858201" cy="461665"/>
+          </a:xfrm>
+          <a:prstGeom prst="rect">
+            <a:avLst/>
+          </a:prstGeom>
+          <a:solidFill>
+            <a:schemeClr val="tx1"/>
+          </a:solidFill>
+        </p:spPr>
+        <p:txBody>
+          <a:bodyPr wrap="none">
+            <a:spAutoFit/>
+          </a:bodyPr>
+          <a:lstStyle/>
+          <a:p>
+            <a:pPr algn="ctr"/>
+            <a:r>
+              <a:rPr lang="en" altLang="ja-JP" sz="2400" b="0" dirty="0">
+                <a:solidFill>
+                  <a:srgbClr val="CE9178"/>
+                </a:solidFill>
+                <a:effectLst/>
+                <a:latin typeface="Menlo" panose="020B0609030804020204" pitchFamily="49" charset="0"/>
+              </a:rPr>
+              <a:t>a b c * +</a:t>
+            </a:r>
+            <a:endParaRPr lang="en" altLang="ja-JP" sz="2400" b="0" dirty="0">
+              <a:solidFill>
+                <a:srgbClr val="D4D4D4"/>
+              </a:solidFill>
+              <a:effectLst/>
+              <a:latin typeface="Menlo" panose="020B0609030804020204" pitchFamily="49" charset="0"/>
+            </a:endParaRPr>
+          </a:p>
+        </p:txBody>
+      </p:sp>
+      <p:sp>
+        <p:nvSpPr>
+          <p:cNvPr id="23" name="正方形/長方形 22">
+            <a:extLst>
+              <a:ext uri="{FF2B5EF4-FFF2-40B4-BE49-F238E27FC236}">
+                <a16:creationId xmlns:a16="http://schemas.microsoft.com/office/drawing/2014/main" id="{B6FA1CCE-D99E-0DC1-D41A-E3416BEAAC0D}"/>
+              </a:ext>
+            </a:extLst>
+          </p:cNvPr>
+          <p:cNvSpPr/>
+          <p:nvPr/>
+        </p:nvSpPr>
+        <p:spPr>
+          <a:xfrm>
+            <a:off x="1304803" y="1894750"/>
+            <a:ext cx="1858201" cy="461665"/>
+          </a:xfrm>
+          <a:prstGeom prst="rect">
+            <a:avLst/>
+          </a:prstGeom>
+          <a:solidFill>
+            <a:schemeClr val="tx1"/>
+          </a:solidFill>
+        </p:spPr>
+        <p:txBody>
+          <a:bodyPr wrap="none">
+            <a:spAutoFit/>
+          </a:bodyPr>
+          <a:lstStyle/>
+          <a:p>
+            <a:pPr algn="ctr"/>
+            <a:r>
+              <a:rPr lang="en" altLang="ja-JP" sz="2400" b="0" dirty="0">
+                <a:solidFill>
+                  <a:srgbClr val="CE9178"/>
+                </a:solidFill>
+                <a:effectLst/>
+                <a:latin typeface="Menlo" panose="020B0609030804020204" pitchFamily="49" charset="0"/>
+              </a:rPr>
+              <a:t>a + b * c</a:t>
+            </a:r>
+            <a:endParaRPr lang="en" altLang="ja-JP" sz="2400" b="0" dirty="0">
+              <a:solidFill>
+                <a:srgbClr val="D4D4D4"/>
+              </a:solidFill>
+              <a:effectLst/>
+              <a:latin typeface="Menlo" panose="020B0609030804020204" pitchFamily="49" charset="0"/>
+            </a:endParaRPr>
+          </a:p>
+        </p:txBody>
+      </p:sp>
+      <p:sp>
+        <p:nvSpPr>
+          <p:cNvPr id="24" name="正方形/長方形 23">
+            <a:extLst>
+              <a:ext uri="{FF2B5EF4-FFF2-40B4-BE49-F238E27FC236}">
+                <a16:creationId xmlns:a16="http://schemas.microsoft.com/office/drawing/2014/main" id="{6F4BEE45-2FB6-0A0B-B07F-633FF0CDA854}"/>
+              </a:ext>
+            </a:extLst>
+          </p:cNvPr>
+          <p:cNvSpPr/>
+          <p:nvPr/>
+        </p:nvSpPr>
+        <p:spPr>
+          <a:xfrm>
+            <a:off x="490845" y="4950478"/>
+            <a:ext cx="2230098" cy="461665"/>
+          </a:xfrm>
+          <a:prstGeom prst="rect">
+            <a:avLst/>
+          </a:prstGeom>
+          <a:solidFill>
+            <a:schemeClr val="tx1"/>
+          </a:solidFill>
+        </p:spPr>
+        <p:txBody>
+          <a:bodyPr wrap="none">
+            <a:spAutoFit/>
+          </a:bodyPr>
+          <a:lstStyle/>
+          <a:p>
+            <a:pPr algn="ctr"/>
+            <a:r>
+              <a:rPr lang="en" altLang="ja-JP" sz="2400" dirty="0">
+                <a:solidFill>
+                  <a:srgbClr val="CE9178"/>
+                </a:solidFill>
+                <a:latin typeface="Menlo" panose="020B0609030804020204" pitchFamily="49" charset="0"/>
+              </a:rPr>
+              <a:t>(</a:t>
+            </a:r>
+            <a:r>
+              <a:rPr lang="en" altLang="ja-JP" sz="2400" b="0" dirty="0">
+                <a:solidFill>
+                  <a:srgbClr val="CE9178"/>
+                </a:solidFill>
+                <a:effectLst/>
+                <a:latin typeface="Menlo" panose="020B0609030804020204" pitchFamily="49" charset="0"/>
+              </a:rPr>
+              <a:t>a + b) * c</a:t>
+            </a:r>
+            <a:endParaRPr lang="en" altLang="ja-JP" sz="2400" b="0" dirty="0">
+              <a:solidFill>
+                <a:srgbClr val="D4D4D4"/>
+              </a:solidFill>
+              <a:effectLst/>
+              <a:latin typeface="Menlo" panose="020B0609030804020204" pitchFamily="49" charset="0"/>
+            </a:endParaRPr>
+          </a:p>
+        </p:txBody>
+      </p:sp>
+    </p:spTree>
+    <p:extLst>
+      <p:ext uri="{BB962C8B-B14F-4D97-AF65-F5344CB8AC3E}">
+        <p14:creationId xmlns:p14="http://schemas.microsoft.com/office/powerpoint/2010/main" val="3954737965"/>
       </p:ext>
     </p:extLst>
   </p:cSld>
